--- a/docs/pptx/whole/ritu-linsubhr-sens-death.pptx
+++ b/docs/pptx/whole/ritu-linsubhr-sens-death.pptx
@@ -2443,7 +2443,7 @@
           </p:nvSpPr>
           <p:spPr>
             <a:xfrm>
-              <a:off x="2520195" y="2073503"/>
+              <a:off x="2520043" y="2073503"/>
               <a:ext cx="0" cy="3649639"/>
             </a:xfrm>
             <a:custGeom>
@@ -2486,7 +2486,7 @@
           </p:nvSpPr>
           <p:spPr>
             <a:xfrm>
-              <a:off x="4326850" y="2073503"/>
+              <a:off x="4325074" y="2073503"/>
               <a:ext cx="0" cy="3649639"/>
             </a:xfrm>
             <a:custGeom>
@@ -2529,7 +2529,7 @@
           </p:nvSpPr>
           <p:spPr>
             <a:xfrm>
-              <a:off x="6133505" y="2073503"/>
+              <a:off x="6130105" y="2073503"/>
               <a:ext cx="0" cy="3649639"/>
             </a:xfrm>
             <a:custGeom>
@@ -2572,7 +2572,7 @@
           </p:nvSpPr>
           <p:spPr>
             <a:xfrm>
-              <a:off x="7940161" y="2073503"/>
+              <a:off x="7935136" y="2073503"/>
               <a:ext cx="0" cy="3649639"/>
             </a:xfrm>
             <a:custGeom>
@@ -2830,7 +2830,7 @@
           </p:nvSpPr>
           <p:spPr>
             <a:xfrm>
-              <a:off x="1616868" y="2073503"/>
+              <a:off x="1617528" y="2073503"/>
               <a:ext cx="0" cy="3649639"/>
             </a:xfrm>
             <a:custGeom>
@@ -2873,7 +2873,7 @@
           </p:nvSpPr>
           <p:spPr>
             <a:xfrm>
-              <a:off x="3423523" y="2073503"/>
+              <a:off x="3422559" y="2073503"/>
               <a:ext cx="0" cy="3649639"/>
             </a:xfrm>
             <a:custGeom>
@@ -2916,7 +2916,7 @@
           </p:nvSpPr>
           <p:spPr>
             <a:xfrm>
-              <a:off x="5230178" y="2073503"/>
+              <a:off x="5227590" y="2073503"/>
               <a:ext cx="0" cy="3649639"/>
             </a:xfrm>
             <a:custGeom>
@@ -2959,7 +2959,7 @@
           </p:nvSpPr>
           <p:spPr>
             <a:xfrm>
-              <a:off x="7036833" y="2073503"/>
+              <a:off x="7032620" y="2073503"/>
               <a:ext cx="0" cy="3649639"/>
             </a:xfrm>
             <a:custGeom>
@@ -3127,6 +3127,12 @@
                     <a:pt x="2721655" y="0"/>
                   </a:lnTo>
                   <a:lnTo>
+                    <a:pt x="2793278" y="0"/>
+                  </a:lnTo>
+                  <a:lnTo>
+                    <a:pt x="3581126" y="0"/>
+                  </a:lnTo>
+                  <a:lnTo>
                     <a:pt x="3652748" y="0"/>
                   </a:lnTo>
                   <a:lnTo>
@@ -3598,12 +3604,12 @@
           <p:spPr>
             <a:xfrm>
               <a:off x="1172049" y="2073503"/>
-              <a:ext cx="2721655" cy="0"/>
+              <a:ext cx="2793278" cy="0"/>
             </a:xfrm>
             <a:custGeom>
               <a:avLst/>
               <a:pathLst>
-                <a:path w="2721655" h="0">
+                <a:path w="2793278" h="0">
                   <a:moveTo>
                     <a:pt x="0" y="0"/>
                   </a:moveTo>
@@ -3720,6 +3726,9 @@
                   </a:lnTo>
                   <a:lnTo>
                     <a:pt x="2721655" y="0"/>
+                  </a:lnTo>
+                  <a:lnTo>
+                    <a:pt x="2793278" y="0"/>
                   </a:lnTo>
                 </a:path>
               </a:pathLst>
@@ -3739,13 +3748,13 @@
           </p:nvSpPr>
           <p:spPr>
             <a:xfrm>
-              <a:off x="4824798" y="2073503"/>
-              <a:ext cx="3437881" cy="0"/>
+              <a:off x="4753175" y="2073503"/>
+              <a:ext cx="3509503" cy="0"/>
             </a:xfrm>
             <a:custGeom>
               <a:avLst/>
               <a:pathLst>
-                <a:path w="3437881" h="0">
+                <a:path w="3509503" h="0">
                   <a:moveTo>
                     <a:pt x="0" y="0"/>
                   </a:moveTo>
@@ -3895,6 +3904,9 @@
                   </a:lnTo>
                   <a:lnTo>
                     <a:pt x="3437881" y="0"/>
+                  </a:lnTo>
+                  <a:lnTo>
+                    <a:pt x="3509503" y="0"/>
                   </a:lnTo>
                 </a:path>
               </a:pathLst>
@@ -4239,195 +4251,195 @@
           </p:nvSpPr>
           <p:spPr>
             <a:xfrm>
-              <a:off x="3983154" y="2073503"/>
-              <a:ext cx="4279524" cy="3483746"/>
+              <a:off x="3982852" y="2073503"/>
+              <a:ext cx="4279827" cy="3483746"/>
             </a:xfrm>
             <a:custGeom>
               <a:avLst/>
               <a:pathLst>
-                <a:path w="4279524" h="3483746">
+                <a:path w="4279827" h="3483746">
                   <a:moveTo>
                     <a:pt x="0" y="0"/>
                   </a:moveTo>
                   <a:lnTo>
-                    <a:pt x="53795" y="655088"/>
-                  </a:lnTo>
-                  <a:lnTo>
-                    <a:pt x="125418" y="1321717"/>
-                  </a:lnTo>
-                  <a:lnTo>
-                    <a:pt x="197040" y="1831242"/>
-                  </a:lnTo>
-                  <a:lnTo>
-                    <a:pt x="268663" y="2220688"/>
-                  </a:lnTo>
-                  <a:lnTo>
-                    <a:pt x="340285" y="2518352"/>
-                  </a:lnTo>
-                  <a:lnTo>
-                    <a:pt x="411908" y="2745867"/>
-                  </a:lnTo>
-                  <a:lnTo>
-                    <a:pt x="483530" y="2919763"/>
-                  </a:lnTo>
-                  <a:lnTo>
-                    <a:pt x="555153" y="3052676"/>
-                  </a:lnTo>
-                  <a:lnTo>
-                    <a:pt x="626775" y="3154267"/>
-                  </a:lnTo>
-                  <a:lnTo>
-                    <a:pt x="698398" y="3231915"/>
-                  </a:lnTo>
-                  <a:lnTo>
-                    <a:pt x="770020" y="3291264"/>
-                  </a:lnTo>
-                  <a:lnTo>
-                    <a:pt x="841643" y="3336626"/>
-                  </a:lnTo>
-                  <a:lnTo>
-                    <a:pt x="913265" y="3371298"/>
-                  </a:lnTo>
-                  <a:lnTo>
-                    <a:pt x="984888" y="3397799"/>
-                  </a:lnTo>
-                  <a:lnTo>
-                    <a:pt x="1056510" y="3418054"/>
-                  </a:lnTo>
-                  <a:lnTo>
-                    <a:pt x="1128133" y="3433536"/>
-                  </a:lnTo>
-                  <a:lnTo>
-                    <a:pt x="1199755" y="3445369"/>
-                  </a:lnTo>
-                  <a:lnTo>
-                    <a:pt x="1271378" y="3454413"/>
-                  </a:lnTo>
-                  <a:lnTo>
-                    <a:pt x="1343001" y="3461326"/>
-                  </a:lnTo>
-                  <a:lnTo>
-                    <a:pt x="1414623" y="3466610"/>
-                  </a:lnTo>
-                  <a:lnTo>
-                    <a:pt x="1486246" y="3470649"/>
-                  </a:lnTo>
-                  <a:lnTo>
-                    <a:pt x="1557868" y="3473735"/>
-                  </a:lnTo>
-                  <a:lnTo>
-                    <a:pt x="1629491" y="3476095"/>
-                  </a:lnTo>
-                  <a:lnTo>
-                    <a:pt x="1701113" y="3477898"/>
-                  </a:lnTo>
-                  <a:lnTo>
-                    <a:pt x="1772736" y="3479276"/>
-                  </a:lnTo>
-                  <a:lnTo>
-                    <a:pt x="1844358" y="3480330"/>
-                  </a:lnTo>
-                  <a:lnTo>
-                    <a:pt x="1915981" y="3481135"/>
-                  </a:lnTo>
-                  <a:lnTo>
-                    <a:pt x="1987603" y="3481750"/>
-                  </a:lnTo>
-                  <a:lnTo>
-                    <a:pt x="2059226" y="3482221"/>
-                  </a:lnTo>
-                  <a:lnTo>
-                    <a:pt x="2130848" y="3482580"/>
-                  </a:lnTo>
-                  <a:lnTo>
-                    <a:pt x="2202471" y="3482855"/>
-                  </a:lnTo>
-                  <a:lnTo>
-                    <a:pt x="2274093" y="3483065"/>
-                  </a:lnTo>
-                  <a:lnTo>
-                    <a:pt x="2345716" y="3483226"/>
-                  </a:lnTo>
-                  <a:lnTo>
-                    <a:pt x="2417338" y="3483348"/>
-                  </a:lnTo>
-                  <a:lnTo>
-                    <a:pt x="2488961" y="3483442"/>
-                  </a:lnTo>
-                  <a:lnTo>
-                    <a:pt x="2560583" y="3483514"/>
-                  </a:lnTo>
-                  <a:lnTo>
-                    <a:pt x="2632206" y="3483569"/>
-                  </a:lnTo>
-                  <a:lnTo>
-                    <a:pt x="2703829" y="3483611"/>
-                  </a:lnTo>
-                  <a:lnTo>
-                    <a:pt x="2775451" y="3483643"/>
-                  </a:lnTo>
-                  <a:lnTo>
-                    <a:pt x="2847074" y="3483667"/>
-                  </a:lnTo>
-                  <a:lnTo>
-                    <a:pt x="2918696" y="3483686"/>
-                  </a:lnTo>
-                  <a:lnTo>
-                    <a:pt x="2990319" y="3483700"/>
-                  </a:lnTo>
-                  <a:lnTo>
-                    <a:pt x="3061941" y="3483711"/>
-                  </a:lnTo>
-                  <a:lnTo>
-                    <a:pt x="3133564" y="3483719"/>
-                  </a:lnTo>
-                  <a:lnTo>
-                    <a:pt x="3205186" y="3483726"/>
-                  </a:lnTo>
-                  <a:lnTo>
-                    <a:pt x="3276809" y="3483731"/>
-                  </a:lnTo>
-                  <a:lnTo>
-                    <a:pt x="3348431" y="3483734"/>
-                  </a:lnTo>
-                  <a:lnTo>
-                    <a:pt x="3420054" y="3483737"/>
-                  </a:lnTo>
-                  <a:lnTo>
-                    <a:pt x="3491676" y="3483739"/>
-                  </a:lnTo>
-                  <a:lnTo>
-                    <a:pt x="3563299" y="3483741"/>
-                  </a:lnTo>
-                  <a:lnTo>
-                    <a:pt x="3634921" y="3483742"/>
-                  </a:lnTo>
-                  <a:lnTo>
-                    <a:pt x="3706544" y="3483743"/>
-                  </a:lnTo>
-                  <a:lnTo>
-                    <a:pt x="3778166" y="3483744"/>
-                  </a:lnTo>
-                  <a:lnTo>
-                    <a:pt x="3849789" y="3483745"/>
-                  </a:lnTo>
-                  <a:lnTo>
-                    <a:pt x="3921411" y="3483745"/>
-                  </a:lnTo>
-                  <a:lnTo>
-                    <a:pt x="3993034" y="3483745"/>
-                  </a:lnTo>
-                  <a:lnTo>
-                    <a:pt x="4064657" y="3483746"/>
-                  </a:lnTo>
-                  <a:lnTo>
-                    <a:pt x="4136279" y="3483746"/>
-                  </a:lnTo>
-                  <a:lnTo>
-                    <a:pt x="4207902" y="3483746"/>
-                  </a:lnTo>
-                  <a:lnTo>
-                    <a:pt x="4279524" y="3483746"/>
+                    <a:pt x="54098" y="650891"/>
+                  </a:lnTo>
+                  <a:lnTo>
+                    <a:pt x="125720" y="1311635"/>
+                  </a:lnTo>
+                  <a:lnTo>
+                    <a:pt x="197343" y="1818264"/>
+                  </a:lnTo>
+                  <a:lnTo>
+                    <a:pt x="268965" y="2206726"/>
+                  </a:lnTo>
+                  <a:lnTo>
+                    <a:pt x="340588" y="2504582"/>
+                  </a:lnTo>
+                  <a:lnTo>
+                    <a:pt x="412210" y="2732965"/>
+                  </a:lnTo>
+                  <a:lnTo>
+                    <a:pt x="483833" y="2908079"/>
+                  </a:lnTo>
+                  <a:lnTo>
+                    <a:pt x="555455" y="3042350"/>
+                  </a:lnTo>
+                  <a:lnTo>
+                    <a:pt x="627078" y="3145302"/>
+                  </a:lnTo>
+                  <a:lnTo>
+                    <a:pt x="698701" y="3224242"/>
+                  </a:lnTo>
+                  <a:lnTo>
+                    <a:pt x="770323" y="3284769"/>
+                  </a:lnTo>
+                  <a:lnTo>
+                    <a:pt x="841946" y="3331179"/>
+                  </a:lnTo>
+                  <a:lnTo>
+                    <a:pt x="913568" y="3366765"/>
+                  </a:lnTo>
+                  <a:lnTo>
+                    <a:pt x="985191" y="3394050"/>
+                  </a:lnTo>
+                  <a:lnTo>
+                    <a:pt x="1056813" y="3414971"/>
+                  </a:lnTo>
+                  <a:lnTo>
+                    <a:pt x="1128436" y="3431012"/>
+                  </a:lnTo>
+                  <a:lnTo>
+                    <a:pt x="1200058" y="3443312"/>
+                  </a:lnTo>
+                  <a:lnTo>
+                    <a:pt x="1271681" y="3452743"/>
+                  </a:lnTo>
+                  <a:lnTo>
+                    <a:pt x="1343303" y="3459974"/>
+                  </a:lnTo>
+                  <a:lnTo>
+                    <a:pt x="1414926" y="3465519"/>
+                  </a:lnTo>
+                  <a:lnTo>
+                    <a:pt x="1486548" y="3469770"/>
+                  </a:lnTo>
+                  <a:lnTo>
+                    <a:pt x="1558171" y="3473030"/>
+                  </a:lnTo>
+                  <a:lnTo>
+                    <a:pt x="1629793" y="3475530"/>
+                  </a:lnTo>
+                  <a:lnTo>
+                    <a:pt x="1701416" y="3477446"/>
+                  </a:lnTo>
+                  <a:lnTo>
+                    <a:pt x="1773038" y="3478916"/>
+                  </a:lnTo>
+                  <a:lnTo>
+                    <a:pt x="1844661" y="3480042"/>
+                  </a:lnTo>
+                  <a:lnTo>
+                    <a:pt x="1916283" y="3480906"/>
+                  </a:lnTo>
+                  <a:lnTo>
+                    <a:pt x="1987906" y="3481569"/>
+                  </a:lnTo>
+                  <a:lnTo>
+                    <a:pt x="2059529" y="3482077"/>
+                  </a:lnTo>
+                  <a:lnTo>
+                    <a:pt x="2131151" y="3482466"/>
+                  </a:lnTo>
+                  <a:lnTo>
+                    <a:pt x="2202774" y="3482765"/>
+                  </a:lnTo>
+                  <a:lnTo>
+                    <a:pt x="2274396" y="3482994"/>
+                  </a:lnTo>
+                  <a:lnTo>
+                    <a:pt x="2346019" y="3483169"/>
+                  </a:lnTo>
+                  <a:lnTo>
+                    <a:pt x="2417641" y="3483304"/>
+                  </a:lnTo>
+                  <a:lnTo>
+                    <a:pt x="2489264" y="3483407"/>
+                  </a:lnTo>
+                  <a:lnTo>
+                    <a:pt x="2560886" y="3483486"/>
+                  </a:lnTo>
+                  <a:lnTo>
+                    <a:pt x="2632509" y="3483547"/>
+                  </a:lnTo>
+                  <a:lnTo>
+                    <a:pt x="2704131" y="3483593"/>
+                  </a:lnTo>
+                  <a:lnTo>
+                    <a:pt x="2775754" y="3483629"/>
+                  </a:lnTo>
+                  <a:lnTo>
+                    <a:pt x="2847376" y="3483656"/>
+                  </a:lnTo>
+                  <a:lnTo>
+                    <a:pt x="2918999" y="3483677"/>
+                  </a:lnTo>
+                  <a:lnTo>
+                    <a:pt x="2990621" y="3483694"/>
+                  </a:lnTo>
+                  <a:lnTo>
+                    <a:pt x="3062244" y="3483706"/>
+                  </a:lnTo>
+                  <a:lnTo>
+                    <a:pt x="3133866" y="3483715"/>
+                  </a:lnTo>
+                  <a:lnTo>
+                    <a:pt x="3205489" y="3483723"/>
+                  </a:lnTo>
+                  <a:lnTo>
+                    <a:pt x="3277111" y="3483728"/>
+                  </a:lnTo>
+                  <a:lnTo>
+                    <a:pt x="3348734" y="3483732"/>
+                  </a:lnTo>
+                  <a:lnTo>
+                    <a:pt x="3420357" y="3483736"/>
+                  </a:lnTo>
+                  <a:lnTo>
+                    <a:pt x="3491979" y="3483738"/>
+                  </a:lnTo>
+                  <a:lnTo>
+                    <a:pt x="3563602" y="3483740"/>
+                  </a:lnTo>
+                  <a:lnTo>
+                    <a:pt x="3635224" y="3483742"/>
+                  </a:lnTo>
+                  <a:lnTo>
+                    <a:pt x="3706847" y="3483743"/>
+                  </a:lnTo>
+                  <a:lnTo>
+                    <a:pt x="3778469" y="3483744"/>
+                  </a:lnTo>
+                  <a:lnTo>
+                    <a:pt x="3850092" y="3483744"/>
+                  </a:lnTo>
+                  <a:lnTo>
+                    <a:pt x="3921714" y="3483745"/>
+                  </a:lnTo>
+                  <a:lnTo>
+                    <a:pt x="3993337" y="3483745"/>
+                  </a:lnTo>
+                  <a:lnTo>
+                    <a:pt x="4064959" y="3483745"/>
+                  </a:lnTo>
+                  <a:lnTo>
+                    <a:pt x="4136582" y="3483746"/>
+                  </a:lnTo>
+                  <a:lnTo>
+                    <a:pt x="4208204" y="3483746"/>
+                  </a:lnTo>
+                  <a:lnTo>
+                    <a:pt x="4279827" y="3483746"/>
                   </a:lnTo>
                 </a:path>
               </a:pathLst>
@@ -4499,7 +4511,7 @@
           </p:nvSpPr>
           <p:spPr>
             <a:xfrm>
-              <a:off x="4363883" y="2073503"/>
+              <a:off x="4368185" y="2073503"/>
               <a:ext cx="0" cy="3649639"/>
             </a:xfrm>
             <a:custGeom>
@@ -4542,7 +4554,7 @@
           </p:nvSpPr>
           <p:spPr>
             <a:xfrm>
-              <a:off x="3178931" y="2073503"/>
+              <a:off x="3176242" y="2073503"/>
               <a:ext cx="0" cy="3649639"/>
             </a:xfrm>
             <a:custGeom>
@@ -4585,7 +4597,7 @@
           </p:nvSpPr>
           <p:spPr>
             <a:xfrm>
-              <a:off x="5373904" y="2073503"/>
+              <a:off x="5386913" y="2073503"/>
               <a:ext cx="0" cy="3649639"/>
             </a:xfrm>
             <a:custGeom>
@@ -4858,7 +4870,7 @@
           </p:nvSpPr>
           <p:spPr>
             <a:xfrm>
-              <a:off x="1536080" y="5785772"/>
+              <a:off x="1536741" y="5785772"/>
               <a:ext cx="161574" cy="80101"/>
             </a:xfrm>
             <a:prstGeom prst="rect">
@@ -4904,7 +4916,7 @@
           </p:nvSpPr>
           <p:spPr>
             <a:xfrm>
-              <a:off x="3342736" y="5785772"/>
+              <a:off x="3341771" y="5785772"/>
               <a:ext cx="161574" cy="80101"/>
             </a:xfrm>
             <a:prstGeom prst="rect">
@@ -4950,7 +4962,7 @@
           </p:nvSpPr>
           <p:spPr>
             <a:xfrm>
-              <a:off x="5199088" y="5785772"/>
+              <a:off x="5196500" y="5785772"/>
               <a:ext cx="62179" cy="80101"/>
             </a:xfrm>
             <a:prstGeom prst="rect">
@@ -4996,7 +5008,7 @@
           </p:nvSpPr>
           <p:spPr>
             <a:xfrm>
-              <a:off x="6974654" y="5785772"/>
+              <a:off x="6970441" y="5785772"/>
               <a:ext cx="124358" cy="80101"/>
             </a:xfrm>
             <a:prstGeom prst="rect">
@@ -5167,7 +5179,7 @@
                   <a:latin typeface="Helvetica"/>
                   <a:cs typeface="Helvetica"/>
                 </a:rPr>
-                <a:t>HR per 10 % decline: 29.66 (0.00-Inf), p_Bonf = 1.000 (n = 6)  |  per IQR decline (Δ = 24.3 %): 3775.87 (0.00-Inf)  |  IQR: [-22.7, 1.6] %</a:t>
+                <a:t>HR per 10 % decline: 28.41 (0.00-Inf), p_Bonf = 1.000 (n = 6)  |  per IQR decline (Δ = 24.5 %): 3631.65 (0.00-Inf)  |  IQR: [-22.7, 1.8] %</a:t>
               </a:r>
             </a:p>
           </p:txBody>
